--- a/docs/presentaciones/classes/clase-010-oop-basico-dataclasses-herencia-presentacion.pptx
+++ b/docs/presentaciones/classes/clase-010-oop-basico-dataclasses-herencia-presentacion.pptx
@@ -3272,7 +3272,7 @@
                 </a:solidFill>
                 <a:latin typeface="Segoe UI"/>
               </a:rPr>
-              <a:t>Parte: 0 — Prerrequisitos · Fuente: Ramalho, Fluent Python 2e — caps. 5 (Data Class Builders) y 14 (Inheritance) · Python Tutorial cap. 9. · Duración estimada: 90 min.</a:t>
+              <a:t>Parte: 0 — Prerrequisitos · Fuente: Ramalho, Fluent Python 2e — caps. 5 (Data Class Builders) y 14 (Inheritance) · Python Tutorial cap. 9. · Duración estimada: 90 min. · Nivel: Básico</a:t>
             </a:r>
           </a:p>
         </p:txBody>
@@ -3581,7 +3581,7 @@
                 </a:solidFill>
                 <a:latin typeface="Segoe UI"/>
               </a:rPr>
-              <a:t>Parte: 0 — Prerrequisitos · Fuente: Ramalho, Fluent Python 2e — caps. 5 (Data Class Builders) y 14 (Inheritance) · Python Tutorial cap. 9. · Duración estimada: 90 min.</a:t>
+              <a:t>Parte: 0 — Prerrequisitos · Fuente: Ramalho, Fluent Python 2e — caps. 5 (Data Class Builders) y 14 (Inheritance) · Python Tutorial cap. 9. · Duración estimada: 90 min. · Nivel: Básico</a:t>
             </a:r>
           </a:p>
         </p:txBody>
